--- a/小问号-答辩PPT.pptx
+++ b/小问号-答辩PPT.pptx
@@ -3304,7 +3304,7 @@
         <p:spPr>
           <a:xfrm>
             <a:off x="914400" y="4663440"/>
-            <a:ext cx="10058400" cy="1280160"/>
+            <a:ext cx="10058400" cy="1463040"/>
           </a:xfrm>
           <a:prstGeom prst="rect">
             <a:avLst/>
@@ -3348,6 +3348,23 @@
                 <a:ea typeface="微软雅黑"/>
               </a:rPr>
               <a:t>技术底座：DeepSeek</a:t>
+            </a:r>
+          </a:p>
+          <a:p>
+            <a:pPr algn="l">
+              <a:spcAft>
+                <a:spcPts val="600"/>
+              </a:spcAft>
+            </a:pPr>
+            <a:r>
+              <a:rPr sz="1500" b="1">
+                <a:solidFill>
+                  <a:srgbClr val="FFFFFF"/>
+                </a:solidFill>
+                <a:latin typeface="微软雅黑"/>
+                <a:ea typeface="微软雅黑"/>
+              </a:rPr>
+              <a:t>在线体验：lynnnnyl25.github.io/xiao-wenhao</a:t>
             </a:r>
           </a:p>
         </p:txBody>
@@ -3525,7 +3542,7 @@
                 <a:latin typeface="微软雅黑"/>
                 <a:ea typeface="微软雅黑"/>
               </a:rPr>
-              <a:t>内置 3 段完整回放脚本（变量 / 密码安全 / 二进制），不需要 API Key、不依赖网络模型。</a:t>
+              <a:t>内置 5 段完整回放脚本（变量 / 密码安全 / 二进制 / 循环 / AI 初步），不需要 API Key、不依赖网络模型。</a:t>
             </a:r>
           </a:p>
         </p:txBody>
@@ -10454,7 +10471,7 @@
                 <a:latin typeface="微软雅黑"/>
                 <a:ea typeface="微软雅黑"/>
               </a:rPr>
-              <a:t>护栏通过率 24 / 24 = 100%（3 段回放脚本 · 共 24 轮）</a:t>
+              <a:t>护栏通过率 39 / 39 = 100%（5 段回放脚本 · 共 39 轮）</a:t>
             </a:r>
           </a:p>
         </p:txBody>
@@ -10526,7 +10543,7 @@
                 <a:latin typeface="微软雅黑"/>
                 <a:ea typeface="微软雅黑"/>
               </a:rPr>
-              <a:t>前端交互经 puppeteer 冒烟测试：13 项全通过，零控制台错误。</a:t>
+              <a:t>线上链接经浏览器实测：7 项全通过，零控制台错误。</a:t>
             </a:r>
           </a:p>
         </p:txBody>

--- a/小问号-答辩PPT.pptx
+++ b/小问号-答辩PPT.pptx
@@ -9733,44 +9733,80 @@
         </p:nvSpPr>
         <p:spPr>
           <a:xfrm>
-            <a:off x="731520" y="1645920"/>
-            <a:ext cx="10698480" cy="457200"/>
-          </a:xfrm>
-          <a:prstGeom prst="rect">
-            <a:avLst/>
-          </a:prstGeom>
-          <a:noFill/>
-        </p:spPr>
-        <p:txBody>
-          <a:bodyPr wrap="square" anchor="t" lIns="0" rIns="0" tIns="0" bIns="0">
-            <a:spAutoFit/>
-          </a:bodyPr>
-          <a:lstStyle/>
-          <a:p>
-            <a:pPr algn="l"/>
-            <a:r>
-              <a:rPr sz="1600" b="0">
+            <a:off x="731520" y="1609344"/>
+            <a:ext cx="10698480" cy="384048"/>
+          </a:xfrm>
+          <a:prstGeom prst="rect">
+            <a:avLst/>
+          </a:prstGeom>
+          <a:noFill/>
+        </p:spPr>
+        <p:txBody>
+          <a:bodyPr wrap="square" anchor="t" lIns="0" rIns="0" tIns="0" bIns="0">
+            <a:spAutoFit/>
+          </a:bodyPr>
+          <a:lstStyle/>
+          <a:p>
+            <a:pPr algn="l"/>
+            <a:r>
+              <a:rPr sz="1400" b="0">
                 <a:solidFill>
                   <a:srgbClr val="8A817C"/>
                 </a:solidFill>
                 <a:latin typeface="微软雅黑"/>
                 <a:ea typeface="微软雅黑"/>
               </a:rPr>
-              <a:t>"AI 不给答案"很容易承诺，很难证明。小问号把它变成三个可当场验证的数字。</a:t>
-            </a:r>
-          </a:p>
-        </p:txBody>
-      </p:sp>
-      <p:sp>
-        <p:nvSpPr>
-          <p:cNvPr id="6" name="Rectangle 5"/>
+              <a:t>"不给答案"很容易承诺，很难证明。小问号把它变成五个可当场验证的数字。</a:t>
+            </a:r>
+          </a:p>
+        </p:txBody>
+      </p:sp>
+      <p:sp>
+        <p:nvSpPr>
+          <p:cNvPr id="6" name="TextBox 5"/>
+          <p:cNvSpPr txBox="1"/>
+          <p:nvPr/>
+        </p:nvSpPr>
+        <p:spPr>
+          <a:xfrm>
+            <a:off x="731520" y="1956816"/>
+            <a:ext cx="10698480" cy="320040"/>
+          </a:xfrm>
+          <a:prstGeom prst="rect">
+            <a:avLst/>
+          </a:prstGeom>
+          <a:noFill/>
+        </p:spPr>
+        <p:txBody>
+          <a:bodyPr wrap="square" anchor="t" lIns="0" rIns="0" tIns="0" bIns="0">
+            <a:spAutoFit/>
+          </a:bodyPr>
+          <a:lstStyle/>
+          <a:p>
+            <a:pPr algn="l"/>
+            <a:r>
+              <a:rPr sz="1050" b="0">
+                <a:solidFill>
+                  <a:srgbClr val="F76E8E"/>
+                </a:solidFill>
+                <a:latin typeface="微软雅黑"/>
+                <a:ea typeface="微软雅黑"/>
+              </a:rPr>
+              <a:t>诱导率隐蔽性最高：答案藏进问句，字面合法，学生却只在点头。</a:t>
+            </a:r>
+          </a:p>
+        </p:txBody>
+      </p:sp>
+      <p:sp>
+        <p:nvSpPr>
+          <p:cNvPr id="7" name="Rectangle 6"/>
           <p:cNvSpPr/>
           <p:nvPr/>
         </p:nvSpPr>
         <p:spPr>
           <a:xfrm>
-            <a:off x="731520" y="2286000"/>
-            <a:ext cx="3383280" cy="2103120"/>
+            <a:off x="731520" y="2331720"/>
+            <a:ext cx="3383280" cy="1508760"/>
           </a:xfrm>
           <a:prstGeom prst="rect">
             <a:avLst/>
@@ -9809,65 +9845,65 @@
       </p:sp>
       <p:sp>
         <p:nvSpPr>
-          <p:cNvPr id="7" name="TextBox 6"/>
-          <p:cNvSpPr txBox="1"/>
-          <p:nvPr/>
-        </p:nvSpPr>
-        <p:spPr>
-          <a:xfrm>
-            <a:off x="960120" y="2487168"/>
-            <a:ext cx="2926080" cy="457200"/>
-          </a:xfrm>
-          <a:prstGeom prst="rect">
-            <a:avLst/>
-          </a:prstGeom>
-          <a:noFill/>
-        </p:spPr>
-        <p:txBody>
-          <a:bodyPr wrap="square" anchor="t" lIns="0" rIns="0" tIns="0" bIns="0">
-            <a:spAutoFit/>
-          </a:bodyPr>
-          <a:lstStyle/>
-          <a:p>
-            <a:pPr algn="l"/>
-            <a:r>
-              <a:rPr sz="1800" b="1">
+          <p:cNvPr id="8" name="TextBox 7"/>
+          <p:cNvSpPr txBox="1"/>
+          <p:nvPr/>
+        </p:nvSpPr>
+        <p:spPr>
+          <a:xfrm>
+            <a:off x="932688" y="2459736"/>
+            <a:ext cx="2926080" cy="384048"/>
+          </a:xfrm>
+          <a:prstGeom prst="rect">
+            <a:avLst/>
+          </a:prstGeom>
+          <a:noFill/>
+        </p:spPr>
+        <p:txBody>
+          <a:bodyPr wrap="square" anchor="t" lIns="0" rIns="0" tIns="0" bIns="0">
+            <a:spAutoFit/>
+          </a:bodyPr>
+          <a:lstStyle/>
+          <a:p>
+            <a:pPr algn="l"/>
+            <a:r>
+              <a:rPr sz="1600" b="1">
                 <a:solidFill>
                   <a:srgbClr val="4EA8DE"/>
                 </a:solidFill>
                 <a:latin typeface="微软雅黑"/>
                 <a:ea typeface="微软雅黑"/>
               </a:rPr>
-              <a:t>答问比 Q/A</a:t>
-            </a:r>
-          </a:p>
-        </p:txBody>
-      </p:sp>
-      <p:sp>
-        <p:nvSpPr>
-          <p:cNvPr id="8" name="TextBox 7"/>
-          <p:cNvSpPr txBox="1"/>
-          <p:nvPr/>
-        </p:nvSpPr>
-        <p:spPr>
-          <a:xfrm>
-            <a:off x="960120" y="2999232"/>
-            <a:ext cx="2926080" cy="365760"/>
-          </a:xfrm>
-          <a:prstGeom prst="rect">
-            <a:avLst/>
-          </a:prstGeom>
-          <a:noFill/>
-        </p:spPr>
-        <p:txBody>
-          <a:bodyPr wrap="square" anchor="t" lIns="0" rIns="0" tIns="0" bIns="0">
-            <a:spAutoFit/>
-          </a:bodyPr>
-          <a:lstStyle/>
-          <a:p>
-            <a:pPr algn="l"/>
-            <a:r>
-              <a:rPr sz="1200" b="0">
+              <a:t>答问比</a:t>
+            </a:r>
+          </a:p>
+        </p:txBody>
+      </p:sp>
+      <p:sp>
+        <p:nvSpPr>
+          <p:cNvPr id="9" name="TextBox 8"/>
+          <p:cNvSpPr txBox="1"/>
+          <p:nvPr/>
+        </p:nvSpPr>
+        <p:spPr>
+          <a:xfrm>
+            <a:off x="932688" y="2843784"/>
+            <a:ext cx="2926080" cy="292608"/>
+          </a:xfrm>
+          <a:prstGeom prst="rect">
+            <a:avLst/>
+          </a:prstGeom>
+          <a:noFill/>
+        </p:spPr>
+        <p:txBody>
+          <a:bodyPr wrap="square" anchor="t" lIns="0" rIns="0" tIns="0" bIns="0">
+            <a:spAutoFit/>
+          </a:bodyPr>
+          <a:lstStyle/>
+          <a:p>
+            <a:pPr algn="l"/>
+            <a:r>
+              <a:rPr sz="1100" b="0">
                 <a:solidFill>
                   <a:srgbClr val="8A817C"/>
                 </a:solidFill>
@@ -9881,92 +9917,71 @@
       </p:sp>
       <p:sp>
         <p:nvSpPr>
-          <p:cNvPr id="9" name="TextBox 8"/>
-          <p:cNvSpPr txBox="1"/>
-          <p:nvPr/>
-        </p:nvSpPr>
-        <p:spPr>
-          <a:xfrm>
-            <a:off x="960120" y="3401568"/>
-            <a:ext cx="2926080" cy="640080"/>
-          </a:xfrm>
-          <a:prstGeom prst="rect">
-            <a:avLst/>
-          </a:prstGeom>
-          <a:noFill/>
-        </p:spPr>
-        <p:txBody>
-          <a:bodyPr wrap="square" anchor="t" lIns="0" rIns="0" tIns="0" bIns="0">
-            <a:spAutoFit/>
-          </a:bodyPr>
-          <a:lstStyle/>
-          <a:p>
-            <a:pPr algn="l">
-              <a:spcAft>
-                <a:spcPts val="200"/>
-              </a:spcAft>
-            </a:pPr>
-            <a:r>
-              <a:rPr sz="1200" b="0">
+          <p:cNvPr id="10" name="TextBox 9"/>
+          <p:cNvSpPr txBox="1"/>
+          <p:nvPr/>
+        </p:nvSpPr>
+        <p:spPr>
+          <a:xfrm>
+            <a:off x="932688" y="3136391"/>
+            <a:ext cx="1737360" cy="457200"/>
+          </a:xfrm>
+          <a:prstGeom prst="rect">
+            <a:avLst/>
+          </a:prstGeom>
+          <a:noFill/>
+        </p:spPr>
+        <p:txBody>
+          <a:bodyPr wrap="square" anchor="t" lIns="0" rIns="0" tIns="0" bIns="0">
+            <a:spAutoFit/>
+          </a:bodyPr>
+          <a:lstStyle/>
+          <a:p>
+            <a:pPr algn="l"/>
+            <a:r>
+              <a:rPr sz="2500" b="1">
+                <a:solidFill>
+                  <a:srgbClr val="4EA8DE"/>
+                </a:solidFill>
+                <a:latin typeface="微软雅黑"/>
+                <a:ea typeface="微软雅黑"/>
+              </a:rPr>
+              <a:t>60-90</a:t>
+            </a:r>
+          </a:p>
+        </p:txBody>
+      </p:sp>
+      <p:sp>
+        <p:nvSpPr>
+          <p:cNvPr id="11" name="TextBox 10"/>
+          <p:cNvSpPr txBox="1"/>
+          <p:nvPr/>
+        </p:nvSpPr>
+        <p:spPr>
+          <a:xfrm>
+            <a:off x="2514600" y="3264408"/>
+            <a:ext cx="1417320" cy="292608"/>
+          </a:xfrm>
+          <a:prstGeom prst="rect">
+            <a:avLst/>
+          </a:prstGeom>
+          <a:noFill/>
+        </p:spPr>
+        <p:txBody>
+          <a:bodyPr wrap="square" anchor="t" lIns="0" rIns="0" tIns="0" bIns="0">
+            <a:spAutoFit/>
+          </a:bodyPr>
+          <a:lstStyle/>
+          <a:p>
+            <a:pPr algn="l"/>
+            <a:r>
+              <a:rPr sz="1000" b="0">
                 <a:solidFill>
                   <a:srgbClr val="8A817C"/>
                 </a:solidFill>
                 <a:latin typeface="微软雅黑"/>
                 <a:ea typeface="微软雅黑"/>
               </a:rPr>
-              <a:t>实测</a:t>
-            </a:r>
-          </a:p>
-          <a:p>
-            <a:pPr algn="l">
-              <a:spcAft>
-                <a:spcPts val="200"/>
-              </a:spcAft>
-            </a:pPr>
-            <a:r>
-              <a:rPr sz="3000" b="1">
-                <a:solidFill>
-                  <a:srgbClr val="4EA8DE"/>
-                </a:solidFill>
-                <a:latin typeface="微软雅黑"/>
-                <a:ea typeface="微软雅黑"/>
-              </a:rPr>
-              <a:t>60 – 100</a:t>
-            </a:r>
-          </a:p>
-        </p:txBody>
-      </p:sp>
-      <p:sp>
-        <p:nvSpPr>
-          <p:cNvPr id="10" name="TextBox 9"/>
-          <p:cNvSpPr txBox="1"/>
-          <p:nvPr/>
-        </p:nvSpPr>
-        <p:spPr>
-          <a:xfrm>
-            <a:off x="960120" y="3886200"/>
-            <a:ext cx="2926080" cy="365760"/>
-          </a:xfrm>
-          <a:prstGeom prst="rect">
-            <a:avLst/>
-          </a:prstGeom>
-          <a:noFill/>
-        </p:spPr>
-        <p:txBody>
-          <a:bodyPr wrap="square" anchor="t" lIns="0" rIns="0" tIns="0" bIns="0">
-            <a:spAutoFit/>
-          </a:bodyPr>
-          <a:lstStyle/>
-          <a:p>
-            <a:pPr algn="l"/>
-            <a:r>
-              <a:rPr sz="1200" b="0">
-                <a:solidFill>
-                  <a:srgbClr val="8A817C"/>
-                </a:solidFill>
-                <a:latin typeface="微软雅黑"/>
-                <a:ea typeface="微软雅黑"/>
-              </a:rPr>
               <a:t>目标 ≥ 3</a:t>
             </a:r>
           </a:p>
@@ -9974,14 +9989,14 @@
       </p:sp>
       <p:sp>
         <p:nvSpPr>
-          <p:cNvPr id="11" name="Rectangle 10"/>
+          <p:cNvPr id="12" name="Rectangle 11"/>
           <p:cNvSpPr/>
           <p:nvPr/>
         </p:nvSpPr>
         <p:spPr>
           <a:xfrm>
-            <a:off x="4343400" y="2286000"/>
-            <a:ext cx="3383280" cy="2103120"/>
+            <a:off x="4343400" y="2331720"/>
+            <a:ext cx="3383280" cy="1508760"/>
           </a:xfrm>
           <a:prstGeom prst="rect">
             <a:avLst/>
@@ -10020,29 +10035,29 @@
       </p:sp>
       <p:sp>
         <p:nvSpPr>
-          <p:cNvPr id="12" name="TextBox 11"/>
-          <p:cNvSpPr txBox="1"/>
-          <p:nvPr/>
-        </p:nvSpPr>
-        <p:spPr>
-          <a:xfrm>
-            <a:off x="4572000" y="2487168"/>
-            <a:ext cx="2926080" cy="457200"/>
-          </a:xfrm>
-          <a:prstGeom prst="rect">
-            <a:avLst/>
-          </a:prstGeom>
-          <a:noFill/>
-        </p:spPr>
-        <p:txBody>
-          <a:bodyPr wrap="square" anchor="t" lIns="0" rIns="0" tIns="0" bIns="0">
-            <a:spAutoFit/>
-          </a:bodyPr>
-          <a:lstStyle/>
-          <a:p>
-            <a:pPr algn="l"/>
-            <a:r>
-              <a:rPr sz="1800" b="1">
+          <p:cNvPr id="13" name="TextBox 12"/>
+          <p:cNvSpPr txBox="1"/>
+          <p:nvPr/>
+        </p:nvSpPr>
+        <p:spPr>
+          <a:xfrm>
+            <a:off x="4544568" y="2459736"/>
+            <a:ext cx="2926080" cy="384048"/>
+          </a:xfrm>
+          <a:prstGeom prst="rect">
+            <a:avLst/>
+          </a:prstGeom>
+          <a:noFill/>
+        </p:spPr>
+        <p:txBody>
+          <a:bodyPr wrap="square" anchor="t" lIns="0" rIns="0" tIns="0" bIns="0">
+            <a:spAutoFit/>
+          </a:bodyPr>
+          <a:lstStyle/>
+          <a:p>
+            <a:pPr algn="l"/>
+            <a:r>
+              <a:rPr sz="1600" b="1">
                 <a:solidFill>
                   <a:srgbClr val="57CC99"/>
                 </a:solidFill>
@@ -10056,88 +10071,257 @@
       </p:sp>
       <p:sp>
         <p:nvSpPr>
-          <p:cNvPr id="13" name="TextBox 12"/>
-          <p:cNvSpPr txBox="1"/>
-          <p:nvPr/>
-        </p:nvSpPr>
-        <p:spPr>
-          <a:xfrm>
-            <a:off x="4572000" y="2999232"/>
-            <a:ext cx="2926080" cy="365760"/>
-          </a:xfrm>
-          <a:prstGeom prst="rect">
-            <a:avLst/>
-          </a:prstGeom>
-          <a:noFill/>
-        </p:spPr>
-        <p:txBody>
-          <a:bodyPr wrap="square" anchor="t" lIns="0" rIns="0" tIns="0" bIns="0">
-            <a:spAutoFit/>
-          </a:bodyPr>
-          <a:lstStyle/>
-          <a:p>
-            <a:pPr algn="l"/>
-            <a:r>
-              <a:rPr sz="1200" b="0">
+          <p:cNvPr id="14" name="TextBox 13"/>
+          <p:cNvSpPr txBox="1"/>
+          <p:nvPr/>
+        </p:nvSpPr>
+        <p:spPr>
+          <a:xfrm>
+            <a:off x="4544568" y="2843784"/>
+            <a:ext cx="2926080" cy="292608"/>
+          </a:xfrm>
+          <a:prstGeom prst="rect">
+            <a:avLst/>
+          </a:prstGeom>
+          <a:noFill/>
+        </p:spPr>
+        <p:txBody>
+          <a:bodyPr wrap="square" anchor="t" lIns="0" rIns="0" tIns="0" bIns="0">
+            <a:spAutoFit/>
+          </a:bodyPr>
+          <a:lstStyle/>
+          <a:p>
+            <a:pPr algn="l"/>
+            <a:r>
+              <a:rPr sz="1100" b="0">
                 <a:solidFill>
                   <a:srgbClr val="8A817C"/>
                 </a:solidFill>
                 <a:latin typeface="微软雅黑"/>
                 <a:ea typeface="微软雅黑"/>
               </a:rPr>
-              <a:t>给答案的轮次占比</a:t>
-            </a:r>
-          </a:p>
-        </p:txBody>
-      </p:sp>
-      <p:sp>
-        <p:nvSpPr>
-          <p:cNvPr id="14" name="TextBox 13"/>
-          <p:cNvSpPr txBox="1"/>
-          <p:nvPr/>
-        </p:nvSpPr>
-        <p:spPr>
-          <a:xfrm>
-            <a:off x="4572000" y="3401568"/>
-            <a:ext cx="2926080" cy="640080"/>
-          </a:xfrm>
-          <a:prstGeom prst="rect">
-            <a:avLst/>
-          </a:prstGeom>
-          <a:noFill/>
-        </p:spPr>
-        <p:txBody>
-          <a:bodyPr wrap="square" anchor="t" lIns="0" rIns="0" tIns="0" bIns="0">
-            <a:spAutoFit/>
-          </a:bodyPr>
-          <a:lstStyle/>
-          <a:p>
-            <a:pPr algn="l">
-              <a:spcAft>
-                <a:spcPts val="200"/>
-              </a:spcAft>
-            </a:pPr>
-            <a:r>
-              <a:rPr sz="1200" b="0">
+              <a:t>给答案的轮次</a:t>
+            </a:r>
+          </a:p>
+        </p:txBody>
+      </p:sp>
+      <p:sp>
+        <p:nvSpPr>
+          <p:cNvPr id="15" name="TextBox 14"/>
+          <p:cNvSpPr txBox="1"/>
+          <p:nvPr/>
+        </p:nvSpPr>
+        <p:spPr>
+          <a:xfrm>
+            <a:off x="4544568" y="3136391"/>
+            <a:ext cx="1737360" cy="457200"/>
+          </a:xfrm>
+          <a:prstGeom prst="rect">
+            <a:avLst/>
+          </a:prstGeom>
+          <a:noFill/>
+        </p:spPr>
+        <p:txBody>
+          <a:bodyPr wrap="square" anchor="t" lIns="0" rIns="0" tIns="0" bIns="0">
+            <a:spAutoFit/>
+          </a:bodyPr>
+          <a:lstStyle/>
+          <a:p>
+            <a:pPr algn="l"/>
+            <a:r>
+              <a:rPr sz="2500" b="1">
+                <a:solidFill>
+                  <a:srgbClr val="57CC99"/>
+                </a:solidFill>
+                <a:latin typeface="微软雅黑"/>
+                <a:ea typeface="微软雅黑"/>
+              </a:rPr>
+              <a:t>0%</a:t>
+            </a:r>
+          </a:p>
+        </p:txBody>
+      </p:sp>
+      <p:sp>
+        <p:nvSpPr>
+          <p:cNvPr id="16" name="TextBox 15"/>
+          <p:cNvSpPr txBox="1"/>
+          <p:nvPr/>
+        </p:nvSpPr>
+        <p:spPr>
+          <a:xfrm>
+            <a:off x="6126480" y="3264408"/>
+            <a:ext cx="1417320" cy="292608"/>
+          </a:xfrm>
+          <a:prstGeom prst="rect">
+            <a:avLst/>
+          </a:prstGeom>
+          <a:noFill/>
+        </p:spPr>
+        <p:txBody>
+          <a:bodyPr wrap="square" anchor="t" lIns="0" rIns="0" tIns="0" bIns="0">
+            <a:spAutoFit/>
+          </a:bodyPr>
+          <a:lstStyle/>
+          <a:p>
+            <a:pPr algn="l"/>
+            <a:r>
+              <a:rPr sz="1000" b="0">
                 <a:solidFill>
                   <a:srgbClr val="8A817C"/>
                 </a:solidFill>
                 <a:latin typeface="微软雅黑"/>
                 <a:ea typeface="微软雅黑"/>
               </a:rPr>
-              <a:t>实测</a:t>
-            </a:r>
-          </a:p>
-          <a:p>
-            <a:pPr algn="l">
-              <a:spcAft>
-                <a:spcPts val="200"/>
-              </a:spcAft>
-            </a:pPr>
-            <a:r>
-              <a:rPr sz="3000" b="1">
-                <a:solidFill>
-                  <a:srgbClr val="57CC99"/>
+              <a:t>目标 ≤ 5%</a:t>
+            </a:r>
+          </a:p>
+        </p:txBody>
+      </p:sp>
+      <p:sp>
+        <p:nvSpPr>
+          <p:cNvPr id="17" name="Rectangle 16"/>
+          <p:cNvSpPr/>
+          <p:nvPr/>
+        </p:nvSpPr>
+        <p:spPr>
+          <a:xfrm>
+            <a:off x="7955280" y="2331720"/>
+            <a:ext cx="3383280" cy="1508760"/>
+          </a:xfrm>
+          <a:prstGeom prst="rect">
+            <a:avLst/>
+          </a:prstGeom>
+          <a:solidFill>
+            <a:srgbClr val="FFFFFF"/>
+          </a:solidFill>
+          <a:ln w="12700">
+            <a:solidFill>
+              <a:srgbClr val="F76E8E"/>
+            </a:solidFill>
+          </a:ln>
+          <a:effectLst/>
+        </p:spPr>
+        <p:style>
+          <a:lnRef idx="1">
+            <a:schemeClr val="accent1"/>
+          </a:lnRef>
+          <a:fillRef idx="3">
+            <a:schemeClr val="accent1"/>
+          </a:fillRef>
+          <a:effectRef idx="2">
+            <a:schemeClr val="accent1"/>
+          </a:effectRef>
+          <a:fontRef idx="minor">
+            <a:schemeClr val="lt1"/>
+          </a:fontRef>
+        </p:style>
+        <p:txBody>
+          <a:bodyPr rtlCol="0" anchor="ctr"/>
+          <a:lstStyle/>
+          <a:p>
+            <a:pPr algn="ctr"/>
+          </a:p>
+        </p:txBody>
+      </p:sp>
+      <p:sp>
+        <p:nvSpPr>
+          <p:cNvPr id="18" name="TextBox 17"/>
+          <p:cNvSpPr txBox="1"/>
+          <p:nvPr/>
+        </p:nvSpPr>
+        <p:spPr>
+          <a:xfrm>
+            <a:off x="8156448" y="2459736"/>
+            <a:ext cx="2926080" cy="384048"/>
+          </a:xfrm>
+          <a:prstGeom prst="rect">
+            <a:avLst/>
+          </a:prstGeom>
+          <a:noFill/>
+        </p:spPr>
+        <p:txBody>
+          <a:bodyPr wrap="square" anchor="t" lIns="0" rIns="0" tIns="0" bIns="0">
+            <a:spAutoFit/>
+          </a:bodyPr>
+          <a:lstStyle/>
+          <a:p>
+            <a:pPr algn="l"/>
+            <a:r>
+              <a:rPr sz="1600" b="1">
+                <a:solidFill>
+                  <a:srgbClr val="F76E8E"/>
+                </a:solidFill>
+                <a:latin typeface="微软雅黑"/>
+                <a:ea typeface="微软雅黑"/>
+              </a:rPr>
+              <a:t>诱导率</a:t>
+            </a:r>
+          </a:p>
+        </p:txBody>
+      </p:sp>
+      <p:sp>
+        <p:nvSpPr>
+          <p:cNvPr id="19" name="TextBox 18"/>
+          <p:cNvSpPr txBox="1"/>
+          <p:nvPr/>
+        </p:nvSpPr>
+        <p:spPr>
+          <a:xfrm>
+            <a:off x="8156448" y="2843784"/>
+            <a:ext cx="2926080" cy="292608"/>
+          </a:xfrm>
+          <a:prstGeom prst="rect">
+            <a:avLst/>
+          </a:prstGeom>
+          <a:noFill/>
+        </p:spPr>
+        <p:txBody>
+          <a:bodyPr wrap="square" anchor="t" lIns="0" rIns="0" tIns="0" bIns="0">
+            <a:spAutoFit/>
+          </a:bodyPr>
+          <a:lstStyle/>
+          <a:p>
+            <a:pPr algn="l"/>
+            <a:r>
+              <a:rPr sz="1100" b="0">
+                <a:solidFill>
+                  <a:srgbClr val="8A817C"/>
+                </a:solidFill>
+                <a:latin typeface="微软雅黑"/>
+                <a:ea typeface="微软雅黑"/>
+              </a:rPr>
+              <a:t>答案藏进问句</a:t>
+            </a:r>
+          </a:p>
+        </p:txBody>
+      </p:sp>
+      <p:sp>
+        <p:nvSpPr>
+          <p:cNvPr id="20" name="TextBox 19"/>
+          <p:cNvSpPr txBox="1"/>
+          <p:nvPr/>
+        </p:nvSpPr>
+        <p:spPr>
+          <a:xfrm>
+            <a:off x="8156448" y="3136391"/>
+            <a:ext cx="1737360" cy="457200"/>
+          </a:xfrm>
+          <a:prstGeom prst="rect">
+            <a:avLst/>
+          </a:prstGeom>
+          <a:noFill/>
+        </p:spPr>
+        <p:txBody>
+          <a:bodyPr wrap="square" anchor="t" lIns="0" rIns="0" tIns="0" bIns="0">
+            <a:spAutoFit/>
+          </a:bodyPr>
+          <a:lstStyle/>
+          <a:p>
+            <a:pPr algn="l"/>
+            <a:r>
+              <a:rPr sz="2500" b="1">
+                <a:solidFill>
+                  <a:srgbClr val="F76E8E"/>
                 </a:solidFill>
                 <a:latin typeface="微软雅黑"/>
                 <a:ea typeface="微软雅黑"/>
@@ -10149,50 +10333,50 @@
       </p:sp>
       <p:sp>
         <p:nvSpPr>
-          <p:cNvPr id="15" name="TextBox 14"/>
-          <p:cNvSpPr txBox="1"/>
-          <p:nvPr/>
-        </p:nvSpPr>
-        <p:spPr>
-          <a:xfrm>
-            <a:off x="4572000" y="3886200"/>
-            <a:ext cx="2926080" cy="365760"/>
-          </a:xfrm>
-          <a:prstGeom prst="rect">
-            <a:avLst/>
-          </a:prstGeom>
-          <a:noFill/>
-        </p:spPr>
-        <p:txBody>
-          <a:bodyPr wrap="square" anchor="t" lIns="0" rIns="0" tIns="0" bIns="0">
-            <a:spAutoFit/>
-          </a:bodyPr>
-          <a:lstStyle/>
-          <a:p>
-            <a:pPr algn="l"/>
-            <a:r>
-              <a:rPr sz="1200" b="0">
+          <p:cNvPr id="21" name="TextBox 20"/>
+          <p:cNvSpPr txBox="1"/>
+          <p:nvPr/>
+        </p:nvSpPr>
+        <p:spPr>
+          <a:xfrm>
+            <a:off x="9738360" y="3264408"/>
+            <a:ext cx="1417320" cy="292608"/>
+          </a:xfrm>
+          <a:prstGeom prst="rect">
+            <a:avLst/>
+          </a:prstGeom>
+          <a:noFill/>
+        </p:spPr>
+        <p:txBody>
+          <a:bodyPr wrap="square" anchor="t" lIns="0" rIns="0" tIns="0" bIns="0">
+            <a:spAutoFit/>
+          </a:bodyPr>
+          <a:lstStyle/>
+          <a:p>
+            <a:pPr algn="l"/>
+            <a:r>
+              <a:rPr sz="1000" b="0">
                 <a:solidFill>
                   <a:srgbClr val="8A817C"/>
                 </a:solidFill>
                 <a:latin typeface="微软雅黑"/>
                 <a:ea typeface="微软雅黑"/>
               </a:rPr>
-              <a:t>目标 ≤ 5%</a:t>
-            </a:r>
-          </a:p>
-        </p:txBody>
-      </p:sp>
-      <p:sp>
-        <p:nvSpPr>
-          <p:cNvPr id="16" name="Rectangle 15"/>
+              <a:t>目标 ≤ 10%</a:t>
+            </a:r>
+          </a:p>
+        </p:txBody>
+      </p:sp>
+      <p:sp>
+        <p:nvSpPr>
+          <p:cNvPr id="22" name="Rectangle 21"/>
           <p:cNvSpPr/>
           <p:nvPr/>
         </p:nvSpPr>
         <p:spPr>
           <a:xfrm>
-            <a:off x="7955280" y="2286000"/>
-            <a:ext cx="3383280" cy="2103120"/>
+            <a:off x="731520" y="4023360"/>
+            <a:ext cx="3383280" cy="1508760"/>
           </a:xfrm>
           <a:prstGeom prst="rect">
             <a:avLst/>
@@ -10231,71 +10415,261 @@
       </p:sp>
       <p:sp>
         <p:nvSpPr>
-          <p:cNvPr id="17" name="TextBox 16"/>
-          <p:cNvSpPr txBox="1"/>
-          <p:nvPr/>
-        </p:nvSpPr>
-        <p:spPr>
-          <a:xfrm>
-            <a:off x="8183880" y="2487168"/>
-            <a:ext cx="2926080" cy="457200"/>
-          </a:xfrm>
-          <a:prstGeom prst="rect">
-            <a:avLst/>
-          </a:prstGeom>
-          <a:noFill/>
-        </p:spPr>
-        <p:txBody>
-          <a:bodyPr wrap="square" anchor="t" lIns="0" rIns="0" tIns="0" bIns="0">
-            <a:spAutoFit/>
-          </a:bodyPr>
-          <a:lstStyle/>
-          <a:p>
-            <a:pPr algn="l"/>
-            <a:r>
-              <a:rPr sz="1800" b="1">
+          <p:cNvPr id="23" name="TextBox 22"/>
+          <p:cNvSpPr txBox="1"/>
+          <p:nvPr/>
+        </p:nvSpPr>
+        <p:spPr>
+          <a:xfrm>
+            <a:off x="932688" y="4151376"/>
+            <a:ext cx="2926080" cy="384048"/>
+          </a:xfrm>
+          <a:prstGeom prst="rect">
+            <a:avLst/>
+          </a:prstGeom>
+          <a:noFill/>
+        </p:spPr>
+        <p:txBody>
+          <a:bodyPr wrap="square" anchor="t" lIns="0" rIns="0" tIns="0" bIns="0">
+            <a:spAutoFit/>
+          </a:bodyPr>
+          <a:lstStyle/>
+          <a:p>
+            <a:pPr algn="l"/>
+            <a:r>
+              <a:rPr sz="1600" b="1">
                 <a:solidFill>
                   <a:srgbClr val="FF8A5B"/>
                 </a:solidFill>
                 <a:latin typeface="微软雅黑"/>
                 <a:ea typeface="微软雅黑"/>
               </a:rPr>
-              <a:t>缺口闭合率</a:t>
-            </a:r>
-          </a:p>
-        </p:txBody>
-      </p:sp>
-      <p:sp>
-        <p:nvSpPr>
-          <p:cNvPr id="18" name="TextBox 17"/>
-          <p:cNvSpPr txBox="1"/>
-          <p:nvPr/>
-        </p:nvSpPr>
-        <p:spPr>
-          <a:xfrm>
-            <a:off x="8183880" y="2999232"/>
-            <a:ext cx="2926080" cy="365760"/>
-          </a:xfrm>
-          <a:prstGeom prst="rect">
-            <a:avLst/>
-          </a:prstGeom>
-          <a:noFill/>
-        </p:spPr>
-        <p:txBody>
-          <a:bodyPr wrap="square" anchor="t" lIns="0" rIns="0" tIns="0" bIns="0">
-            <a:spAutoFit/>
-          </a:bodyPr>
-          <a:lstStyle/>
-          <a:p>
-            <a:pPr algn="l"/>
-            <a:r>
-              <a:rPr sz="1200" b="0">
+              <a:t>一问一题</a:t>
+            </a:r>
+          </a:p>
+        </p:txBody>
+      </p:sp>
+      <p:sp>
+        <p:nvSpPr>
+          <p:cNvPr id="24" name="TextBox 23"/>
+          <p:cNvSpPr txBox="1"/>
+          <p:nvPr/>
+        </p:nvSpPr>
+        <p:spPr>
+          <a:xfrm>
+            <a:off x="932688" y="4535424"/>
+            <a:ext cx="2926080" cy="292608"/>
+          </a:xfrm>
+          <a:prstGeom prst="rect">
+            <a:avLst/>
+          </a:prstGeom>
+          <a:noFill/>
+        </p:spPr>
+        <p:txBody>
+          <a:bodyPr wrap="square" anchor="t" lIns="0" rIns="0" tIns="0" bIns="0">
+            <a:spAutoFit/>
+          </a:bodyPr>
+          <a:lstStyle/>
+          <a:p>
+            <a:pPr algn="l"/>
+            <a:r>
+              <a:rPr sz="1100" b="0">
                 <a:solidFill>
                   <a:srgbClr val="8A817C"/>
                 </a:solidFill>
                 <a:latin typeface="微软雅黑"/>
                 <a:ea typeface="微软雅黑"/>
               </a:rPr>
+              <a:t>只含一个问号</a:t>
+            </a:r>
+          </a:p>
+        </p:txBody>
+      </p:sp>
+      <p:sp>
+        <p:nvSpPr>
+          <p:cNvPr id="25" name="TextBox 24"/>
+          <p:cNvSpPr txBox="1"/>
+          <p:nvPr/>
+        </p:nvSpPr>
+        <p:spPr>
+          <a:xfrm>
+            <a:off x="932688" y="4828032"/>
+            <a:ext cx="1737360" cy="457200"/>
+          </a:xfrm>
+          <a:prstGeom prst="rect">
+            <a:avLst/>
+          </a:prstGeom>
+          <a:noFill/>
+        </p:spPr>
+        <p:txBody>
+          <a:bodyPr wrap="square" anchor="t" lIns="0" rIns="0" tIns="0" bIns="0">
+            <a:spAutoFit/>
+          </a:bodyPr>
+          <a:lstStyle/>
+          <a:p>
+            <a:pPr algn="l"/>
+            <a:r>
+              <a:rPr sz="2500" b="1">
+                <a:solidFill>
+                  <a:srgbClr val="FF8A5B"/>
+                </a:solidFill>
+                <a:latin typeface="微软雅黑"/>
+                <a:ea typeface="微软雅黑"/>
+              </a:rPr>
+              <a:t>100%</a:t>
+            </a:r>
+          </a:p>
+        </p:txBody>
+      </p:sp>
+      <p:sp>
+        <p:nvSpPr>
+          <p:cNvPr id="26" name="TextBox 25"/>
+          <p:cNvSpPr txBox="1"/>
+          <p:nvPr/>
+        </p:nvSpPr>
+        <p:spPr>
+          <a:xfrm>
+            <a:off x="2514600" y="4956048"/>
+            <a:ext cx="1417320" cy="292608"/>
+          </a:xfrm>
+          <a:prstGeom prst="rect">
+            <a:avLst/>
+          </a:prstGeom>
+          <a:noFill/>
+        </p:spPr>
+        <p:txBody>
+          <a:bodyPr wrap="square" anchor="t" lIns="0" rIns="0" tIns="0" bIns="0">
+            <a:spAutoFit/>
+          </a:bodyPr>
+          <a:lstStyle/>
+          <a:p>
+            <a:pPr algn="l"/>
+            <a:r>
+              <a:rPr sz="1000" b="0">
+                <a:solidFill>
+                  <a:srgbClr val="8A817C"/>
+                </a:solidFill>
+                <a:latin typeface="微软雅黑"/>
+                <a:ea typeface="微软雅黑"/>
+              </a:rPr>
+              <a:t>目标 ≥ 95%</a:t>
+            </a:r>
+          </a:p>
+        </p:txBody>
+      </p:sp>
+      <p:sp>
+        <p:nvSpPr>
+          <p:cNvPr id="27" name="Rectangle 26"/>
+          <p:cNvSpPr/>
+          <p:nvPr/>
+        </p:nvSpPr>
+        <p:spPr>
+          <a:xfrm>
+            <a:off x="4343400" y="4023360"/>
+            <a:ext cx="3383280" cy="1508760"/>
+          </a:xfrm>
+          <a:prstGeom prst="rect">
+            <a:avLst/>
+          </a:prstGeom>
+          <a:solidFill>
+            <a:srgbClr val="FFFFFF"/>
+          </a:solidFill>
+          <a:ln w="12700">
+            <a:solidFill>
+              <a:srgbClr val="9B72CF"/>
+            </a:solidFill>
+          </a:ln>
+          <a:effectLst/>
+        </p:spPr>
+        <p:style>
+          <a:lnRef idx="1">
+            <a:schemeClr val="accent1"/>
+          </a:lnRef>
+          <a:fillRef idx="3">
+            <a:schemeClr val="accent1"/>
+          </a:fillRef>
+          <a:effectRef idx="2">
+            <a:schemeClr val="accent1"/>
+          </a:effectRef>
+          <a:fontRef idx="minor">
+            <a:schemeClr val="lt1"/>
+          </a:fontRef>
+        </p:style>
+        <p:txBody>
+          <a:bodyPr rtlCol="0" anchor="ctr"/>
+          <a:lstStyle/>
+          <a:p>
+            <a:pPr algn="ctr"/>
+          </a:p>
+        </p:txBody>
+      </p:sp>
+      <p:sp>
+        <p:nvSpPr>
+          <p:cNvPr id="28" name="TextBox 27"/>
+          <p:cNvSpPr txBox="1"/>
+          <p:nvPr/>
+        </p:nvSpPr>
+        <p:spPr>
+          <a:xfrm>
+            <a:off x="4544568" y="4151376"/>
+            <a:ext cx="2926080" cy="384048"/>
+          </a:xfrm>
+          <a:prstGeom prst="rect">
+            <a:avLst/>
+          </a:prstGeom>
+          <a:noFill/>
+        </p:spPr>
+        <p:txBody>
+          <a:bodyPr wrap="square" anchor="t" lIns="0" rIns="0" tIns="0" bIns="0">
+            <a:spAutoFit/>
+          </a:bodyPr>
+          <a:lstStyle/>
+          <a:p>
+            <a:pPr algn="l"/>
+            <a:r>
+              <a:rPr sz="1600" b="1">
+                <a:solidFill>
+                  <a:srgbClr val="9B72CF"/>
+                </a:solidFill>
+                <a:latin typeface="微软雅黑"/>
+                <a:ea typeface="微软雅黑"/>
+              </a:rPr>
+              <a:t>闭合率</a:t>
+            </a:r>
+          </a:p>
+        </p:txBody>
+      </p:sp>
+      <p:sp>
+        <p:nvSpPr>
+          <p:cNvPr id="29" name="TextBox 28"/>
+          <p:cNvSpPr txBox="1"/>
+          <p:nvPr/>
+        </p:nvSpPr>
+        <p:spPr>
+          <a:xfrm>
+            <a:off x="4544568" y="4535424"/>
+            <a:ext cx="2926080" cy="292608"/>
+          </a:xfrm>
+          <a:prstGeom prst="rect">
+            <a:avLst/>
+          </a:prstGeom>
+          <a:noFill/>
+        </p:spPr>
+        <p:txBody>
+          <a:bodyPr wrap="square" anchor="t" lIns="0" rIns="0" tIns="0" bIns="0">
+            <a:spAutoFit/>
+          </a:bodyPr>
+          <a:lstStyle/>
+          <a:p>
+            <a:pPr algn="l"/>
+            <a:r>
+              <a:rPr sz="1100" b="0">
+                <a:solidFill>
+                  <a:srgbClr val="8A817C"/>
+                </a:solidFill>
+                <a:latin typeface="微软雅黑"/>
+                <a:ea typeface="微软雅黑"/>
+              </a:rPr>
               <a:t>已闭合 ÷ 诊断出</a:t>
             </a:r>
           </a:p>
@@ -10303,92 +10677,71 @@
       </p:sp>
       <p:sp>
         <p:nvSpPr>
-          <p:cNvPr id="19" name="TextBox 18"/>
-          <p:cNvSpPr txBox="1"/>
-          <p:nvPr/>
-        </p:nvSpPr>
-        <p:spPr>
-          <a:xfrm>
-            <a:off x="8183880" y="3401568"/>
-            <a:ext cx="2926080" cy="640080"/>
-          </a:xfrm>
-          <a:prstGeom prst="rect">
-            <a:avLst/>
-          </a:prstGeom>
-          <a:noFill/>
-        </p:spPr>
-        <p:txBody>
-          <a:bodyPr wrap="square" anchor="t" lIns="0" rIns="0" tIns="0" bIns="0">
-            <a:spAutoFit/>
-          </a:bodyPr>
-          <a:lstStyle/>
-          <a:p>
-            <a:pPr algn="l">
-              <a:spcAft>
-                <a:spcPts val="200"/>
-              </a:spcAft>
-            </a:pPr>
-            <a:r>
-              <a:rPr sz="1200" b="0">
+          <p:cNvPr id="30" name="TextBox 29"/>
+          <p:cNvSpPr txBox="1"/>
+          <p:nvPr/>
+        </p:nvSpPr>
+        <p:spPr>
+          <a:xfrm>
+            <a:off x="4544568" y="4828032"/>
+            <a:ext cx="1737360" cy="457200"/>
+          </a:xfrm>
+          <a:prstGeom prst="rect">
+            <a:avLst/>
+          </a:prstGeom>
+          <a:noFill/>
+        </p:spPr>
+        <p:txBody>
+          <a:bodyPr wrap="square" anchor="t" lIns="0" rIns="0" tIns="0" bIns="0">
+            <a:spAutoFit/>
+          </a:bodyPr>
+          <a:lstStyle/>
+          <a:p>
+            <a:pPr algn="l"/>
+            <a:r>
+              <a:rPr sz="2500" b="1">
+                <a:solidFill>
+                  <a:srgbClr val="9B72CF"/>
+                </a:solidFill>
+                <a:latin typeface="微软雅黑"/>
+                <a:ea typeface="微软雅黑"/>
+              </a:rPr>
+              <a:t>100%</a:t>
+            </a:r>
+          </a:p>
+        </p:txBody>
+      </p:sp>
+      <p:sp>
+        <p:nvSpPr>
+          <p:cNvPr id="31" name="TextBox 30"/>
+          <p:cNvSpPr txBox="1"/>
+          <p:nvPr/>
+        </p:nvSpPr>
+        <p:spPr>
+          <a:xfrm>
+            <a:off x="6126480" y="4956048"/>
+            <a:ext cx="1417320" cy="292608"/>
+          </a:xfrm>
+          <a:prstGeom prst="rect">
+            <a:avLst/>
+          </a:prstGeom>
+          <a:noFill/>
+        </p:spPr>
+        <p:txBody>
+          <a:bodyPr wrap="square" anchor="t" lIns="0" rIns="0" tIns="0" bIns="0">
+            <a:spAutoFit/>
+          </a:bodyPr>
+          <a:lstStyle/>
+          <a:p>
+            <a:pPr algn="l"/>
+            <a:r>
+              <a:rPr sz="1000" b="0">
                 <a:solidFill>
                   <a:srgbClr val="8A817C"/>
                 </a:solidFill>
                 <a:latin typeface="微软雅黑"/>
                 <a:ea typeface="微软雅黑"/>
               </a:rPr>
-              <a:t>实测</a:t>
-            </a:r>
-          </a:p>
-          <a:p>
-            <a:pPr algn="l">
-              <a:spcAft>
-                <a:spcPts val="200"/>
-              </a:spcAft>
-            </a:pPr>
-            <a:r>
-              <a:rPr sz="3000" b="1">
-                <a:solidFill>
-                  <a:srgbClr val="FF8A5B"/>
-                </a:solidFill>
-                <a:latin typeface="微软雅黑"/>
-                <a:ea typeface="微软雅黑"/>
-              </a:rPr>
-              <a:t>100%</a:t>
-            </a:r>
-          </a:p>
-        </p:txBody>
-      </p:sp>
-      <p:sp>
-        <p:nvSpPr>
-          <p:cNvPr id="20" name="TextBox 19"/>
-          <p:cNvSpPr txBox="1"/>
-          <p:nvPr/>
-        </p:nvSpPr>
-        <p:spPr>
-          <a:xfrm>
-            <a:off x="8183880" y="3886200"/>
-            <a:ext cx="2926080" cy="365760"/>
-          </a:xfrm>
-          <a:prstGeom prst="rect">
-            <a:avLst/>
-          </a:prstGeom>
-          <a:noFill/>
-        </p:spPr>
-        <p:txBody>
-          <a:bodyPr wrap="square" anchor="t" lIns="0" rIns="0" tIns="0" bIns="0">
-            <a:spAutoFit/>
-          </a:bodyPr>
-          <a:lstStyle/>
-          <a:p>
-            <a:pPr algn="l"/>
-            <a:r>
-              <a:rPr sz="1200" b="0">
-                <a:solidFill>
-                  <a:srgbClr val="8A817C"/>
-                </a:solidFill>
-                <a:latin typeface="微软雅黑"/>
-                <a:ea typeface="微软雅黑"/>
-              </a:rPr>
               <a:t>目标 ≥ 60%</a:t>
             </a:r>
           </a:p>
@@ -10396,14 +10749,14 @@
       </p:sp>
       <p:sp>
         <p:nvSpPr>
-          <p:cNvPr id="21" name="Rectangle 20"/>
+          <p:cNvPr id="32" name="Rectangle 31"/>
           <p:cNvSpPr/>
           <p:nvPr/>
         </p:nvSpPr>
         <p:spPr>
           <a:xfrm>
-            <a:off x="731520" y="4709160"/>
-            <a:ext cx="10698480" cy="914400"/>
+            <a:off x="731520" y="5806440"/>
+            <a:ext cx="10698480" cy="658368"/>
           </a:xfrm>
           <a:prstGeom prst="rect">
             <a:avLst/>
@@ -10442,108 +10795,72 @@
       </p:sp>
       <p:sp>
         <p:nvSpPr>
-          <p:cNvPr id="22" name="TextBox 21"/>
-          <p:cNvSpPr txBox="1"/>
-          <p:nvPr/>
-        </p:nvSpPr>
-        <p:spPr>
-          <a:xfrm>
-            <a:off x="1005840" y="4892040"/>
-            <a:ext cx="10149840" cy="640080"/>
-          </a:xfrm>
-          <a:prstGeom prst="rect">
-            <a:avLst/>
-          </a:prstGeom>
-          <a:noFill/>
-        </p:spPr>
-        <p:txBody>
-          <a:bodyPr wrap="square" anchor="t" lIns="0" rIns="0" tIns="0" bIns="0">
-            <a:spAutoFit/>
-          </a:bodyPr>
-          <a:lstStyle/>
-          <a:p>
-            <a:pPr algn="l"/>
-            <a:r>
-              <a:rPr sz="1700" b="1">
+          <p:cNvPr id="33" name="TextBox 32"/>
+          <p:cNvSpPr txBox="1"/>
+          <p:nvPr/>
+        </p:nvSpPr>
+        <p:spPr>
+          <a:xfrm>
+            <a:off x="960120" y="5943600"/>
+            <a:ext cx="10241280" cy="384048"/>
+          </a:xfrm>
+          <a:prstGeom prst="rect">
+            <a:avLst/>
+          </a:prstGeom>
+          <a:noFill/>
+        </p:spPr>
+        <p:txBody>
+          <a:bodyPr wrap="square" anchor="t" lIns="0" rIns="0" tIns="0" bIns="0">
+            <a:spAutoFit/>
+          </a:bodyPr>
+          <a:lstStyle/>
+          <a:p>
+            <a:pPr algn="l"/>
+            <a:r>
+              <a:rPr sz="1400" b="1">
                 <a:solidFill>
                   <a:srgbClr val="2F9E75"/>
                 </a:solidFill>
                 <a:latin typeface="微软雅黑"/>
                 <a:ea typeface="微软雅黑"/>
               </a:rPr>
-              <a:t>护栏通过率 39 / 39 = 100%（5 段回放脚本 · 共 39 轮）</a:t>
-            </a:r>
-          </a:p>
-        </p:txBody>
-      </p:sp>
-      <p:sp>
-        <p:nvSpPr>
-          <p:cNvPr id="23" name="TextBox 22"/>
-          <p:cNvSpPr txBox="1"/>
-          <p:nvPr/>
-        </p:nvSpPr>
-        <p:spPr>
-          <a:xfrm>
-            <a:off x="1005840" y="5285232"/>
-            <a:ext cx="10149840" cy="365760"/>
-          </a:xfrm>
-          <a:prstGeom prst="rect">
-            <a:avLst/>
-          </a:prstGeom>
-          <a:noFill/>
-        </p:spPr>
-        <p:txBody>
-          <a:bodyPr wrap="square" anchor="t" lIns="0" rIns="0" tIns="0" bIns="0">
-            <a:spAutoFit/>
-          </a:bodyPr>
-          <a:lstStyle/>
-          <a:p>
-            <a:pPr algn="l"/>
-            <a:r>
-              <a:rPr sz="1100" b="0">
+              <a:t>护栏通过率 39 / 39 = 100%（5 段脚本 · 共 39 轮）</a:t>
+            </a:r>
+          </a:p>
+        </p:txBody>
+      </p:sp>
+      <p:sp>
+        <p:nvSpPr>
+          <p:cNvPr id="34" name="TextBox 33"/>
+          <p:cNvSpPr txBox="1"/>
+          <p:nvPr/>
+        </p:nvSpPr>
+        <p:spPr>
+          <a:xfrm>
+            <a:off x="731520" y="6473952"/>
+            <a:ext cx="10698480" cy="274320"/>
+          </a:xfrm>
+          <a:prstGeom prst="rect">
+            <a:avLst/>
+          </a:prstGeom>
+          <a:noFill/>
+        </p:spPr>
+        <p:txBody>
+          <a:bodyPr wrap="square" anchor="t" lIns="0" rIns="0" tIns="0" bIns="0">
+            <a:spAutoFit/>
+          </a:bodyPr>
+          <a:lstStyle/>
+          <a:p>
+            <a:pPr algn="l"/>
+            <a:r>
+              <a:rPr sz="900" b="0">
                 <a:solidFill>
                   <a:srgbClr val="8A817C"/>
                 </a:solidFill>
                 <a:latin typeface="微软雅黑"/>
                 <a:ea typeface="微软雅黑"/>
               </a:rPr>
-              <a:t>数据来源：pnpm selfcheck，结果可复现；评委可在使用时随时查看，无需信任开发者自述。</a:t>
-            </a:r>
-          </a:p>
-        </p:txBody>
-      </p:sp>
-      <p:sp>
-        <p:nvSpPr>
-          <p:cNvPr id="24" name="TextBox 23"/>
-          <p:cNvSpPr txBox="1"/>
-          <p:nvPr/>
-        </p:nvSpPr>
-        <p:spPr>
-          <a:xfrm>
-            <a:off x="731520" y="5897880"/>
-            <a:ext cx="10698480" cy="457200"/>
-          </a:xfrm>
-          <a:prstGeom prst="rect">
-            <a:avLst/>
-          </a:prstGeom>
-          <a:noFill/>
-        </p:spPr>
-        <p:txBody>
-          <a:bodyPr wrap="square" anchor="t" lIns="0" rIns="0" tIns="0" bIns="0">
-            <a:spAutoFit/>
-          </a:bodyPr>
-          <a:lstStyle/>
-          <a:p>
-            <a:pPr algn="l"/>
-            <a:r>
-              <a:rPr sz="1300" b="0">
-                <a:solidFill>
-                  <a:srgbClr val="8A817C"/>
-                </a:solidFill>
-                <a:latin typeface="微软雅黑"/>
-                <a:ea typeface="微软雅黑"/>
-              </a:rPr>
-              <a:t>线上链接经浏览器实测：7 项全通过，零控制台错误。</a:t>
+              <a:t>数据来源 pnpm selfcheck，结果可复现</a:t>
             </a:r>
           </a:p>
         </p:txBody>
